--- a/deck/Art-and-Science-of-Vibe-Coding-v4.pptx
+++ b/deck/Art-and-Science-of-Vibe-Coding-v4.pptx
@@ -301,8 +301,12 @@
           <a:lstStyle/>
           <a:p>
             <a:r>
+              <a:rPr lang="en-US"/>
+              <a:t>Welcome </a:t>
+            </a:r>
+            <a:r>
               <a:rPr lang="en-US" dirty="0"/>
-              <a:t>Welcome to this special presentation “The Art and Science of Vibe Coding”  … My name is Sepehr Pakbaz AI solution Architect at Microsoft and GitHub. This presentation is for anyone that is using in Software Development Lifecycle and applies to any model or any harness that you are using today. Its not about a single product, its about the fundamental architecture of and ways that LLM can help us be more productive today minimizing the downsides. Reducing the cost, increase quality of the code and be more efficient in Software Development Lifecycle.</a:t>
+              <a:t>to this special presentation “The Art and Science of Vibe Coding”  …. This presentation is for anyone who is involved in Software Development Lifecycle like developers or DevOps engineers or anyone really who wants to do software development better with AI tools and applies to any model or any harness that you are using today. Its not about a single product, its about the fundamental architecture of and ways that LLM can help us be more productive today minimizing the downsides. Reducing the cost, increase quality of the code and be more efficient in Software Development Lifecycle.</a:t>
             </a:r>
             <a:br>
               <a:rPr lang="en-US" dirty="0"/>
@@ -1472,128 +1476,160 @@
           <a:lstStyle/>
           <a:p>
             <a:r>
-              <a:rPr lang="en-US"/>
+              <a:rPr lang="en-US" dirty="0"/>
               <a:t>This is the loop that stops the same failure happening twice.</a:t>
             </a:r>
           </a:p>
           <a:p>
-            <a:endParaRPr lang="en-US"/>
-          </a:p>
-          <a:p>
-            <a:r>
-              <a:rPr lang="en-US"/>
+            <a:endParaRPr lang="en-US" dirty="0"/>
+          </a:p>
+          <a:p>
+            <a:r>
+              <a:rPr lang="en-US" dirty="0"/>
               <a:t>Start with the trace, not with the prompt. A trace tells you what was asked, what came back, which tool ran with which arguments, what the error was, and what the agent could see at the time. Those five together usually locate the failure precisely enough to act.</a:t>
             </a:r>
           </a:p>
           <a:p>
-            <a:endParaRPr lang="en-US"/>
-          </a:p>
-          <a:p>
-            <a:r>
-              <a:rPr lang="en-US"/>
+            <a:endParaRPr lang="en-US" dirty="0"/>
+          </a:p>
+          <a:p>
+            <a:r>
+              <a:rPr lang="en-US" dirty="0"/>
               <a:t>Then name the cause. "Improve the prompt" is not a cause; it is a shrug. "The past-due filter counted DRAFT rows, and no check covered that case" is a cause, because it points at one change and one missing check.</a:t>
             </a:r>
           </a:p>
           <a:p>
-            <a:endParaRPr lang="en-US"/>
-          </a:p>
-          <a:p>
-            <a:r>
-              <a:rPr lang="en-US"/>
+            <a:endParaRPr lang="en-US" dirty="0"/>
+          </a:p>
+          <a:p>
+            <a:r>
+              <a:rPr lang="en-US" dirty="0"/>
               <a:t>Make one reviewed change - a rule, a tool description, a fixture, an acceptance check - and replay the exact case that failed. Then promote it into the gate so it runs every time from now on. One failure becomes one regression test.</a:t>
             </a:r>
           </a:p>
           <a:p>
-            <a:endParaRPr lang="en-US"/>
-          </a:p>
-          <a:p>
-            <a:r>
-              <a:rPr lang="en-US"/>
+            <a:endParaRPr lang="en-US" dirty="0"/>
+          </a:p>
+          <a:p>
+            <a:r>
+              <a:rPr lang="en-US" dirty="0"/>
               <a:t>Be clear about what this is not. The agent is not repairing itself; a person reviews the change. And there is no measured improvement claimed here: this is a working pattern, not a study.</a:t>
             </a:r>
           </a:p>
           <a:p>
-            <a:endParaRPr lang="en-US"/>
-          </a:p>
-          <a:p>
-            <a:r>
-              <a:rPr lang="en-US"/>
-              <a:t>TWTTY from the previous slide is the diagnosis half of this. It produces a hypothesis. The replayable case is what turns that hypothesis into evidence.</a:t>
-            </a:r>
-          </a:p>
-          <a:p>
-            <a:endParaRPr lang="en-US"/>
-          </a:p>
-          <a:p>
-            <a:r>
-              <a:rPr lang="en-US"/>
+            <a:endParaRPr lang="en-US" dirty="0"/>
+          </a:p>
+          <a:p>
+            <a:r>
+              <a:rPr lang="en-US" dirty="0"/>
+              <a:t>TWTTY from the previous slide is the diagnosis half of this. It produces a hypothesis. The </a:t>
+            </a:r>
+            <a:r>
+              <a:rPr lang="en-US" dirty="0" err="1"/>
+              <a:t>replayable</a:t>
+            </a:r>
+            <a:r>
+              <a:rPr lang="en-US" dirty="0"/>
+              <a:t> case is what turns that hypothesis into evidence.</a:t>
+            </a:r>
+          </a:p>
+          <a:p>
+            <a:endParaRPr lang="en-US" dirty="0"/>
+          </a:p>
+          <a:p>
+            <a:r>
+              <a:rPr lang="en-US" dirty="0"/>
               <a:t>PRESENTER CUES</a:t>
             </a:r>
           </a:p>
           <a:p>
             <a:r>
-              <a:rPr lang="en-US"/>
+              <a:rPr lang="en-US" dirty="0"/>
               <a:t>1. Base: walk the five-stage chain once, left to right, in about ten seconds.</a:t>
             </a:r>
           </a:p>
           <a:p>
             <a:r>
-              <a:rPr lang="en-US"/>
+              <a:rPr lang="en-US" dirty="0"/>
               <a:t>2. Click 1: the trace evidence. Point at "context" - it is the one people forget.</a:t>
             </a:r>
           </a:p>
           <a:p>
             <a:r>
-              <a:rPr lang="en-US"/>
+              <a:rPr lang="en-US" dirty="0"/>
               <a:t>3. Click 2: vague versus named failure. Read both aloud; the contrast does the work.</a:t>
             </a:r>
           </a:p>
           <a:p>
             <a:r>
-              <a:rPr lang="en-US"/>
+              <a:rPr lang="en-US" dirty="0"/>
               <a:t>4. Click 3: the rule. TWTTY diagnoses, the replay confirms.</a:t>
             </a:r>
           </a:p>
           <a:p>
-            <a:endParaRPr lang="en-US"/>
-          </a:p>
-          <a:p>
-            <a:r>
-              <a:rPr lang="en-US"/>
+            <a:endParaRPr lang="en-US" dirty="0"/>
+          </a:p>
+          <a:p>
+            <a:r>
+              <a:rPr lang="en-US" dirty="0"/>
               <a:t>TRANSITION</a:t>
             </a:r>
           </a:p>
           <a:p>
             <a:r>
-              <a:rPr lang="en-US"/>
+              <a:rPr lang="en-US" dirty="0"/>
               <a:t>Some fixes belong in a test. The rest belong in repo memory, which is the next slide.</a:t>
             </a:r>
           </a:p>
           <a:p>
-            <a:endParaRPr lang="en-US"/>
-          </a:p>
-          <a:p>
-            <a:r>
-              <a:rPr lang="en-US"/>
+            <a:endParaRPr lang="en-US" dirty="0"/>
+          </a:p>
+          <a:p>
+            <a:r>
+              <a:rPr lang="en-US" dirty="0"/>
               <a:t>SOURCES</a:t>
             </a:r>
           </a:p>
           <a:p>
             <a:r>
-              <a:rPr lang="en-US"/>
+              <a:rPr lang="en-US" dirty="0"/>
               <a:t>- Adapted from the reference deck slides 14 and 20.</a:t>
             </a:r>
           </a:p>
           <a:p>
             <a:r>
-              <a:rPr lang="en-US"/>
-              <a:t>- "HarnessFix," arXiv:2606.06324, https://arxiv.org/html/2606.06324 - emerging 2026 research on trace-guided diagnosis, scoped repair and replay. The paper proposes automated repair; the posture recommended here is a scoped, reviewed change with deterministic replay. No benchmark number from the paper is used.</a:t>
-            </a:r>
-          </a:p>
-          <a:p>
-            <a:r>
-              <a:rPr lang="en-US"/>
-              <a:t>- The named-failure example matches this repository's demo rules in demo/FEATURE-REQUEST.md: DRAFT invoices are never overdue.</a:t>
+              <a:rPr lang="en-US" dirty="0"/>
+              <a:t>- "</a:t>
+            </a:r>
+            <a:r>
+              <a:rPr lang="en-US" dirty="0" err="1"/>
+              <a:t>HarnessFix</a:t>
+            </a:r>
+            <a:r>
+              <a:rPr lang="en-US" dirty="0"/>
+              <a:t>," arXiv:2606.06324, https://</a:t>
+            </a:r>
+            <a:r>
+              <a:rPr lang="en-US" dirty="0" err="1"/>
+              <a:t>arxiv.org</a:t>
+            </a:r>
+            <a:r>
+              <a:rPr lang="en-US" dirty="0"/>
+              <a:t>/html/2606.06324 - emerging 2026 research on trace-guided diagnosis, scoped repair and replay. The paper proposes automated repair; the posture recommended here is a scoped, reviewed change with deterministic replay. No benchmark number from the paper is used.</a:t>
+            </a:r>
+          </a:p>
+          <a:p>
+            <a:r>
+              <a:rPr lang="en-US" dirty="0"/>
+              <a:t>- The named-failure example matches this repository's demo rules in demo/FEATURE-</a:t>
+            </a:r>
+            <a:r>
+              <a:rPr lang="en-US" dirty="0" err="1"/>
+              <a:t>REQUEST.md</a:t>
+            </a:r>
+            <a:r>
+              <a:rPr lang="en-US" dirty="0"/>
+              <a:t>: DRAFT invoices are never overdue.</a:t>
             </a:r>
           </a:p>
         </p:txBody>
@@ -1867,287 +1903,399 @@
           <a:lstStyle/>
           <a:p>
             <a:r>
-              <a:rPr lang="en-US"/>
+              <a:rPr lang="en-US" dirty="0"/>
               <a:t>This slide replaces the old demo, model-choice, measurement and closing slides. Everything operational lives here in the notes.</a:t>
             </a:r>
           </a:p>
           <a:p>
-            <a:endParaRPr lang="en-US"/>
-          </a:p>
-          <a:p>
-            <a:r>
-              <a:rPr lang="en-US"/>
+            <a:endParaRPr lang="en-US" dirty="0"/>
+          </a:p>
+          <a:p>
+            <a:r>
+              <a:rPr lang="en-US" dirty="0"/>
               <a:t>WHAT THE AUDIENCE NEEDS TO HEAR</a:t>
             </a:r>
           </a:p>
           <a:p>
             <a:r>
-              <a:rPr lang="en-US"/>
-              <a:t>Same feature request, run twice. Run A is vibe coding: a short prompt, run it, read the errors, keep going until it passes. Run B is the prepared setup: the same prompt plus AGENTS.md and a fast test command, with TWTTY used only if the loop genuinely stalls. Both runs finish at the same line - the full test suite, the feature checks, and an HTTP check against the running app.</a:t>
-            </a:r>
-          </a:p>
-          <a:p>
-            <a:endParaRPr lang="en-US"/>
-          </a:p>
-          <a:p>
-            <a:r>
-              <a:rPr lang="en-US"/>
-              <a:t>Say plainly what is controlled: the same selected model and reasoning effort, the same harness, the same app commit, the same complete written requirements. The two runs work in independent app-only Git worktrees, and they run sequentially, A first. Nothing is hidden from A: the full requirements are available to both runs.</a:t>
-            </a:r>
-          </a:p>
-          <a:p>
-            <a:endParaRPr lang="en-US"/>
-          </a:p>
-          <a:p>
-            <a:r>
-              <a:rPr lang="en-US"/>
+              <a:rPr lang="en-US" dirty="0"/>
+              <a:t>Same feature request, run twice. Run A is vibe coding: a short prompt, run it, read the errors, keep going until it passes. Run B is the prepared setup: the same prompt plus </a:t>
+            </a:r>
+            <a:r>
+              <a:rPr lang="en-US" dirty="0" err="1"/>
+              <a:t>AGENTS.md</a:t>
+            </a:r>
+            <a:r>
+              <a:rPr lang="en-US" dirty="0"/>
+              <a:t> and a fast test command, with TWTTY used only if the loop genuinely stalls. Both runs finish at the same line - the full test suite, the feature checks, and an HTTP check against the running app.</a:t>
+            </a:r>
+          </a:p>
+          <a:p>
+            <a:endParaRPr lang="en-US" dirty="0"/>
+          </a:p>
+          <a:p>
+            <a:r>
+              <a:rPr lang="en-US" dirty="0"/>
+              <a:t>Say plainly what is controlled: the same selected model and reasoning effort, the same harness, the same app commit, the same complete written requirements. The two runs work in independent app-only Git </a:t>
+            </a:r>
+            <a:r>
+              <a:rPr lang="en-US" dirty="0" err="1"/>
+              <a:t>worktrees</a:t>
+            </a:r>
+            <a:r>
+              <a:rPr lang="en-US" dirty="0"/>
+              <a:t>, and they run sequentially, A first. Nothing is hidden from A: the full requirements are available to both runs.</a:t>
+            </a:r>
+          </a:p>
+          <a:p>
+            <a:endParaRPr lang="en-US" dirty="0"/>
+          </a:p>
+          <a:p>
+            <a:r>
+              <a:rPr lang="en-US" dirty="0"/>
               <a:t>Say plainly what is being measured: total wall time to the finish line, the actual session cost reported by Insights including every correction and TWTTY turn, and the number of correction rounds. Setup is counted separately, not folded into B's number. If a cost is not reported, it is unknown, not zero.</a:t>
             </a:r>
           </a:p>
           <a:p>
-            <a:endParaRPr lang="en-US"/>
-          </a:p>
-          <a:p>
-            <a:r>
-              <a:rPr lang="en-US"/>
+            <a:endParaRPr lang="en-US" dirty="0"/>
+          </a:p>
+          <a:p>
+            <a:r>
+              <a:rPr lang="en-US" dirty="0"/>
               <a:t>Say plainly what is not claimed: that B wins. A can win. Do not steer A into errors, and do not perform the outcome - the honest version is more convincing than the rehearsed one.</a:t>
             </a:r>
           </a:p>
           <a:p>
-            <a:endParaRPr lang="en-US"/>
-          </a:p>
-          <a:p>
-            <a:r>
-              <a:rPr lang="en-US"/>
+            <a:endParaRPr lang="en-US" dirty="0"/>
+          </a:p>
+          <a:p>
+            <a:r>
+              <a:rPr lang="en-US" dirty="0"/>
               <a:t>BEFORE YOU START</a:t>
             </a:r>
           </a:p>
           <a:p>
             <a:r>
-              <a:rPr lang="en-US"/>
+              <a:rPr lang="en-US" dirty="0"/>
               <a:t>- Both child sessions are already idle and ready. Run A session: 740463f1-c897-43a4-9dcf-ef8b2ef4e833. Run B session: 2c4cd043-0fde-42a5-9672-c83fac8b2fa5.</a:t>
             </a:r>
           </a:p>
           <a:p>
             <a:r>
-              <a:rPr lang="en-US"/>
+              <a:rPr lang="en-US" dirty="0"/>
               <a:t>- Confirm the same model and the same reasoning effort are selected in both sessions before starting. Check this on screen; it is the control the whole comparison rests on.</a:t>
             </a:r>
           </a:p>
           <a:p>
             <a:r>
-              <a:rPr lang="en-US"/>
+              <a:rPr lang="en-US" dirty="0"/>
               <a:t>- Trial already prepared as: live-demo-20260918.</a:t>
             </a:r>
           </a:p>
           <a:p>
-            <a:endParaRPr lang="en-US"/>
-          </a:p>
-          <a:p>
-            <a:r>
-              <a:rPr lang="en-US"/>
+            <a:endParaRPr lang="en-US" dirty="0"/>
+          </a:p>
+          <a:p>
+            <a:r>
+              <a:rPr lang="en-US" dirty="0"/>
               <a:t>RUNNER COMMANDS (from the repository root)</a:t>
             </a:r>
           </a:p>
           <a:p>
             <a:r>
-              <a:rPr lang="en-US"/>
-              <a:t>The runner records timing and prints prompts; it does not send messages to the child sessions. After start A, immediately paste its returned prompt into the Run A child session. Wait for the agent to finish, then run check A. If the check fails, paste feedback A's actual output into the same child session, let it work, and check again. Repeat the same procedure for B only after A has finished. If you use twtty B, paste its output into B as a new turn and check again after the response. Presenter pauses count in wall time.</a:t>
-            </a:r>
-          </a:p>
-          <a:p>
-            <a:endParaRPr lang="en-US"/>
-          </a:p>
-          <a:p>
-            <a:r>
-              <a:rPr lang="en-US"/>
-              <a:t>- node demo/run.js start A --trial live-demo-20260918</a:t>
-            </a:r>
-          </a:p>
-          <a:p>
-            <a:r>
-              <a:rPr lang="en-US"/>
-              <a:t>- node demo/run.js check A --trial live-demo-20260918</a:t>
-            </a:r>
-          </a:p>
-          <a:p>
-            <a:r>
-              <a:rPr lang="en-US"/>
-              <a:t>- node demo/run.js feedback A --trial live-demo-20260918   (paste the full flagged output back to run A)</a:t>
-            </a:r>
-          </a:p>
-          <a:p>
-            <a:r>
-              <a:rPr lang="en-US"/>
+              <a:rPr lang="en-US" dirty="0"/>
+              <a:t>The runner records timing and prints prompts; it does not send messages to the child sessions. After start A, immediately paste its returned prompt into the Run A child session. Wait for the agent to finish, then run check A. If the check fails, paste feedback A's actual output into the same child session, let it work, and check again. Repeat the same procedure for B only after A has finished. If you use </a:t>
+            </a:r>
+            <a:r>
+              <a:rPr lang="en-US" dirty="0" err="1"/>
+              <a:t>twtty</a:t>
+            </a:r>
+            <a:r>
+              <a:rPr lang="en-US" dirty="0"/>
+              <a:t> B, paste its output into B as a new turn and check again after the response. Presenter pauses count in wall time.</a:t>
+            </a:r>
+          </a:p>
+          <a:p>
+            <a:endParaRPr lang="en-US" dirty="0"/>
+          </a:p>
+          <a:p>
+            <a:r>
+              <a:rPr lang="en-US" dirty="0"/>
+              <a:t>- node demo/</a:t>
+            </a:r>
+            <a:r>
+              <a:rPr lang="en-US" dirty="0" err="1"/>
+              <a:t>run.js</a:t>
+            </a:r>
+            <a:r>
+              <a:rPr lang="en-US" dirty="0"/>
+              <a:t> start A --trial live-demo-20260918</a:t>
+            </a:r>
+          </a:p>
+          <a:p>
+            <a:r>
+              <a:rPr lang="en-US" dirty="0"/>
+              <a:t>- node demo/</a:t>
+            </a:r>
+            <a:r>
+              <a:rPr lang="en-US" dirty="0" err="1"/>
+              <a:t>run.js</a:t>
+            </a:r>
+            <a:r>
+              <a:rPr lang="en-US" dirty="0"/>
+              <a:t> check A --trial live-demo-20260918</a:t>
+            </a:r>
+          </a:p>
+          <a:p>
+            <a:r>
+              <a:rPr lang="en-US" dirty="0"/>
+              <a:t>- node demo/</a:t>
+            </a:r>
+            <a:r>
+              <a:rPr lang="en-US" dirty="0" err="1"/>
+              <a:t>run.js</a:t>
+            </a:r>
+            <a:r>
+              <a:rPr lang="en-US" dirty="0"/>
+              <a:t> feedback A --trial live-demo-20260918   (paste the full flagged output back to run A)</a:t>
+            </a:r>
+          </a:p>
+          <a:p>
+            <a:r>
+              <a:rPr lang="en-US" dirty="0"/>
               <a:t>- repeat check/feedback for A until the checks pass</a:t>
             </a:r>
           </a:p>
           <a:p>
             <a:r>
-              <a:rPr lang="en-US"/>
+              <a:rPr lang="en-US" dirty="0"/>
               <a:t>- then the same sequence for B: start B, check B, feedback B</a:t>
             </a:r>
           </a:p>
           <a:p>
             <a:r>
-              <a:rPr lang="en-US"/>
-              <a:t>- node demo/run.js twtty B --trial live-demo-20260918   (only if B's loop stalls)</a:t>
-            </a:r>
-          </a:p>
-          <a:p>
-            <a:r>
-              <a:rPr lang="en-US"/>
-              <a:t>- node demo/run.js insights A --provenance ... --reference ... --trial live-demo-20260918, and the same for B. Insights values are typed in manually from what you observed; the runner does not invent them.</a:t>
-            </a:r>
-          </a:p>
-          <a:p>
-            <a:r>
-              <a:rPr lang="en-US"/>
-              <a:t>- node demo/run.js compare --trial live-demo-20260918</a:t>
-            </a:r>
-          </a:p>
-          <a:p>
-            <a:endParaRPr lang="en-US"/>
-          </a:p>
-          <a:p>
-            <a:r>
-              <a:rPr lang="en-US"/>
+              <a:rPr lang="en-US" dirty="0"/>
+              <a:t>- node demo/</a:t>
+            </a:r>
+            <a:r>
+              <a:rPr lang="en-US" dirty="0" err="1"/>
+              <a:t>run.js</a:t>
+            </a:r>
+            <a:r>
+              <a:rPr lang="en-US" dirty="0"/>
+              <a:t> </a:t>
+            </a:r>
+            <a:r>
+              <a:rPr lang="en-US" dirty="0" err="1"/>
+              <a:t>twtty</a:t>
+            </a:r>
+            <a:r>
+              <a:rPr lang="en-US" dirty="0"/>
+              <a:t> B --trial live-demo-20260918   (only if B's loop stalls)</a:t>
+            </a:r>
+          </a:p>
+          <a:p>
+            <a:r>
+              <a:rPr lang="en-US" dirty="0"/>
+              <a:t>- node demo/</a:t>
+            </a:r>
+            <a:r>
+              <a:rPr lang="en-US" dirty="0" err="1"/>
+              <a:t>run.js</a:t>
+            </a:r>
+            <a:r>
+              <a:rPr lang="en-US" dirty="0"/>
+              <a:t> insights A --provenance ... --reference ... --trial live-demo-20260918, and the same for B. Insights values are typed in manually from what you observed; the runner does not invent them.</a:t>
+            </a:r>
+          </a:p>
+          <a:p>
+            <a:r>
+              <a:rPr lang="en-US" dirty="0"/>
+              <a:t>- node demo/</a:t>
+            </a:r>
+            <a:r>
+              <a:rPr lang="en-US" dirty="0" err="1"/>
+              <a:t>run.js</a:t>
+            </a:r>
+            <a:r>
+              <a:rPr lang="en-US" dirty="0"/>
+              <a:t> compare --trial live-demo-20260918</a:t>
+            </a:r>
+          </a:p>
+          <a:p>
+            <a:endParaRPr lang="en-US" dirty="0"/>
+          </a:p>
+          <a:p>
+            <a:r>
+              <a:rPr lang="en-US" dirty="0"/>
               <a:t>INSIGHTS ENTRY TEMPLATE</a:t>
             </a:r>
           </a:p>
           <a:p>
             <a:r>
-              <a:rPr lang="en-US"/>
+              <a:rPr lang="en-US" dirty="0"/>
               <a:t>The abbreviated insights commands above need the values you actually observed. For currency cost, append --cost-value OBSERVED_AMOUNT --cost-unit DISPLAYED_CURRENCY. If Insights reports credits instead, append --ai-credit-value OBSERVED_AMOUNT --ai-credit-unit DISPLAYED_UNIT. Replace the uppercase placeholders; do not copy example numbers. Add --model "SELECTED_MODEL", use --provenance "child session Insights", and set --reference to that lane's session ID. Omit unavailable metrics rather than estimating them. Currency and credits are separate units.</a:t>
             </a:r>
           </a:p>
           <a:p>
-            <a:endParaRPr lang="en-US"/>
-          </a:p>
-          <a:p>
-            <a:r>
-              <a:rPr lang="en-US"/>
+            <a:endParaRPr lang="en-US" dirty="0"/>
+          </a:p>
+          <a:p>
+            <a:r>
+              <a:rPr lang="en-US" dirty="0"/>
               <a:t>WHAT THE FEATURE ACTUALLY REQUIRES (both runs get this in writing)</a:t>
             </a:r>
           </a:p>
           <a:p>
             <a:r>
-              <a:rPr lang="en-US"/>
+              <a:rPr lang="en-US" dirty="0"/>
               <a:t>- An "Overdue only" checkbox on GET /invoices, submitting overdue=1 when checked.</a:t>
             </a:r>
           </a:p>
           <a:p>
             <a:r>
-              <a:rPr lang="en-US"/>
+              <a:rPr lang="en-US" dirty="0"/>
               <a:t>- Overdue means status is exactly SENT and the due date is strictly before the as-of date. Due today is not overdue. DRAFT, PAID and CANCELLED are never overdue. There is no hidden gotcha; the rules are stated for both runs.</a:t>
             </a:r>
           </a:p>
           <a:p>
             <a:r>
-              <a:rPr lang="en-US"/>
+              <a:rPr lang="en-US" dirty="0"/>
               <a:t>- The filter composes with the existing q, status and customer filters, and all active filters survive the links.</a:t>
             </a:r>
           </a:p>
           <a:p>
             <a:r>
-              <a:rPr lang="en-US"/>
+              <a:rPr lang="en-US" dirty="0"/>
               <a:t>- The 25-row page size stays. The summary shows the matching count and total outstanding for the whole filtered set, before pagination.</a:t>
             </a:r>
           </a:p>
           <a:p>
-            <a:endParaRPr lang="en-US"/>
-          </a:p>
-          <a:p>
-            <a:r>
-              <a:rPr lang="en-US"/>
+            <a:endParaRPr lang="en-US" dirty="0"/>
+          </a:p>
+          <a:p>
+            <a:r>
+              <a:rPr lang="en-US" dirty="0"/>
               <a:t>CAVEATS TO KEEP HONEST</a:t>
             </a:r>
           </a:p>
           <a:p>
             <a:r>
-              <a:rPr lang="en-US"/>
+              <a:rPr lang="en-US" dirty="0"/>
               <a:t>- The app is a dependency-free, server-rendered synthetic invoice app with no authentication. The HTTP check reads the HTML the app returned; it is not a browser test. Make no browser, auth or performance claims.</a:t>
             </a:r>
           </a:p>
           <a:p>
             <a:r>
-              <a:rPr lang="en-US"/>
+              <a:rPr lang="en-US" dirty="0"/>
               <a:t>- The setup shown on screen is not the time it took to author or provision that setup. If the all-in preparation cost was not measured, say it is unknown.</a:t>
             </a:r>
           </a:p>
           <a:p>
             <a:r>
-              <a:rPr lang="en-US"/>
+              <a:rPr lang="en-US" dirty="0"/>
               <a:t>- One run is an illustration, not a result. Repeating it is what would make it a finding.</a:t>
             </a:r>
           </a:p>
           <a:p>
-            <a:endParaRPr lang="en-US"/>
-          </a:p>
-          <a:p>
-            <a:r>
-              <a:rPr lang="en-US"/>
+            <a:endParaRPr lang="en-US" dirty="0"/>
+          </a:p>
+          <a:p>
+            <a:r>
+              <a:rPr lang="en-US" dirty="0"/>
               <a:t>CLOSING BEAT (no extra slide)</a:t>
             </a:r>
           </a:p>
           <a:p>
             <a:r>
-              <a:rPr lang="en-US"/>
+              <a:rPr lang="en-US" dirty="0"/>
               <a:t>Ask the room three questions off this slide: did both runs reach the same finish line; what were the two totals, with setup shown separately; and what actually reduced the rework. Answer from the recorded numbers on screen, not from the expected winner. Then take questions.</a:t>
             </a:r>
           </a:p>
           <a:p>
-            <a:endParaRPr lang="en-US"/>
-          </a:p>
-          <a:p>
-            <a:r>
-              <a:rPr lang="en-US"/>
+            <a:endParaRPr lang="en-US" dirty="0"/>
+          </a:p>
+          <a:p>
+            <a:r>
+              <a:rPr lang="en-US" dirty="0"/>
               <a:t>PRESENTER CUES</a:t>
             </a:r>
           </a:p>
           <a:p>
             <a:r>
-              <a:rPr lang="en-US"/>
+              <a:rPr lang="en-US" dirty="0"/>
               <a:t>1. Base: read the shared prompt aloud, then name the two cards.</a:t>
             </a:r>
           </a:p>
           <a:p>
             <a:r>
-              <a:rPr lang="en-US"/>
+              <a:rPr lang="en-US" dirty="0"/>
               <a:t>2. Click 1: Run A's loop.</a:t>
             </a:r>
           </a:p>
           <a:p>
             <a:r>
-              <a:rPr lang="en-US"/>
+              <a:rPr lang="en-US" dirty="0"/>
               <a:t>3. Click 2: Run B's loop.</a:t>
             </a:r>
           </a:p>
           <a:p>
             <a:r>
-              <a:rPr lang="en-US"/>
+              <a:rPr lang="en-US" dirty="0"/>
               <a:t>4. Click 3: the shared finish line and the three metric labels. Leave them empty until the runs are done, then fill them in live.</a:t>
             </a:r>
           </a:p>
           <a:p>
-            <a:endParaRPr lang="en-US"/>
-          </a:p>
-          <a:p>
-            <a:r>
-              <a:rPr lang="en-US"/>
+            <a:endParaRPr lang="en-US" dirty="0"/>
+          </a:p>
+          <a:p>
+            <a:r>
+              <a:rPr lang="en-US" dirty="0"/>
               <a:t>SOURCES</a:t>
             </a:r>
           </a:p>
           <a:p>
             <a:r>
-              <a:rPr lang="en-US"/>
+              <a:rPr lang="en-US" dirty="0"/>
               <a:t>- Consolidates the previous slides 16 through 20 of this deck.</a:t>
             </a:r>
           </a:p>
           <a:p>
             <a:r>
-              <a:rPr lang="en-US"/>
-              <a:t>- Repository-local: demo/README.md, demo/FEATURE-REQUEST.md, demo/prep/AGENTS.md, demo/run.js. No external URL, and no archived trial numbers apply to this run.</a:t>
+              <a:rPr lang="en-US" dirty="0"/>
+              <a:t>- Repository-local: demo/</a:t>
+            </a:r>
+            <a:r>
+              <a:rPr lang="en-US" dirty="0" err="1"/>
+              <a:t>README.md</a:t>
+            </a:r>
+            <a:r>
+              <a:rPr lang="en-US" dirty="0"/>
+              <a:t>, demo/FEATURE-</a:t>
+            </a:r>
+            <a:r>
+              <a:rPr lang="en-US" dirty="0" err="1"/>
+              <a:t>REQUEST.md</a:t>
+            </a:r>
+            <a:r>
+              <a:rPr lang="en-US" dirty="0"/>
+              <a:t>, demo/prep/</a:t>
+            </a:r>
+            <a:r>
+              <a:rPr lang="en-US" dirty="0" err="1"/>
+              <a:t>AGENTS.md</a:t>
+            </a:r>
+            <a:r>
+              <a:rPr lang="en-US" dirty="0"/>
+              <a:t>, demo/</a:t>
+            </a:r>
+            <a:r>
+              <a:rPr lang="en-US" dirty="0" err="1"/>
+              <a:t>run.js</a:t>
+            </a:r>
+            <a:r>
+              <a:rPr lang="en-US" dirty="0"/>
+              <a:t>. No external URL, and no archived trial numbers apply to this run.</a:t>
             </a:r>
           </a:p>
         </p:txBody>
@@ -38272,4 +38420,10 @@
   <we:bindings/>
   <we:snapshot xmlns:r="http://schemas.openxmlformats.org/officeDocument/2006/relationships"/>
 </we:webextension>
+</file>
+
+<file path=docMetadata/LabelInfo.xml><?xml version="1.0" encoding="utf-8"?>
+<clbl:labelList xmlns:clbl="http://schemas.microsoft.com/office/2020/mipLabelMetadata">
+  <clbl:label id="{f42aa342-8706-4288-bd11-ebb85995028c}" enabled="1" method="Standard" siteId="{72f988bf-86f1-41af-91ab-2d7cd011db47}" contentBits="0" removed="0"/>
+</clbl:labelList>
 </file>